--- a/기획/몬스터 기획서_PollutionMonitor.pptx
+++ b/기획/몬스터 기획서_PollutionMonitor.pptx
@@ -230,7 +230,7 @@
           <a:p>
             <a:fld id="{90ADBB8C-8191-4AEC-B0E4-021A6DCC5E88}" type="datetimeFigureOut">
               <a:rPr lang="ko-KR" altLang="en-US" smtClean="0"/>
-              <a:t>2026-05-12</a:t>
+              <a:t>2026-05-13</a:t>
             </a:fld>
             <a:endParaRPr lang="ko-KR" altLang="en-US"/>
           </a:p>
@@ -407,7 +407,7 @@
           <a:p>
             <a:fld id="{9A139F74-74AF-4C37-AE84-1000E0D0E51D}" type="datetimeFigureOut">
               <a:rPr lang="ko-KR" altLang="en-US" smtClean="0"/>
-              <a:t>2026-05-12</a:t>
+              <a:t>2026-05-13</a:t>
             </a:fld>
             <a:endParaRPr lang="ko-KR" altLang="en-US"/>
           </a:p>
@@ -821,7 +821,7 @@
           <a:p>
             <a:fld id="{FBFF74CB-B97E-448A-8613-336F71D317F5}" type="datetime1">
               <a:rPr lang="ko-KR" altLang="en-US" smtClean="0"/>
-              <a:t>2026-05-12</a:t>
+              <a:t>2026-05-13</a:t>
             </a:fld>
             <a:endParaRPr lang="ko-KR" altLang="en-US"/>
           </a:p>
@@ -1112,7 +1112,7 @@
           <a:p>
             <a:fld id="{6D5A3F2E-880D-4AB2-BE87-1DABB4D9D36B}" type="datetime1">
               <a:rPr lang="ko-KR" altLang="en-US" smtClean="0"/>
-              <a:t>2026-05-12</a:t>
+              <a:t>2026-05-13</a:t>
             </a:fld>
             <a:endParaRPr lang="ko-KR" altLang="en-US"/>
           </a:p>
@@ -1310,7 +1310,7 @@
           <a:p>
             <a:fld id="{E225792B-2F2C-46B3-9536-A6BE584A3133}" type="datetime1">
               <a:rPr lang="ko-KR" altLang="en-US" smtClean="0"/>
-              <a:t>2026-05-12</a:t>
+              <a:t>2026-05-13</a:t>
             </a:fld>
             <a:endParaRPr lang="ko-KR" altLang="en-US"/>
           </a:p>
@@ -1518,7 +1518,7 @@
           <a:p>
             <a:fld id="{B959B1C4-1FB0-4ED1-88EC-81D9419D81DC}" type="datetime1">
               <a:rPr lang="ko-KR" altLang="en-US" smtClean="0"/>
-              <a:t>2026-05-12</a:t>
+              <a:t>2026-05-13</a:t>
             </a:fld>
             <a:endParaRPr lang="ko-KR" altLang="en-US"/>
           </a:p>
@@ -1789,7 +1789,7 @@
           <a:p>
             <a:fld id="{644DB65B-E6AE-4B39-8D08-8DC3DC9B3DE6}" type="datetime1">
               <a:rPr lang="ko-KR" altLang="en-US" smtClean="0"/>
-              <a:t>2026-05-12</a:t>
+              <a:t>2026-05-13</a:t>
             </a:fld>
             <a:endParaRPr lang="ko-KR" altLang="en-US"/>
           </a:p>
@@ -2060,7 +2060,7 @@
           <a:p>
             <a:fld id="{644DB65B-E6AE-4B39-8D08-8DC3DC9B3DE6}" type="datetime1">
               <a:rPr lang="ko-KR" altLang="en-US" smtClean="0"/>
-              <a:t>2026-05-12</a:t>
+              <a:t>2026-05-13</a:t>
             </a:fld>
             <a:endParaRPr lang="ko-KR" altLang="en-US"/>
           </a:p>
@@ -2372,7 +2372,7 @@
           <a:p>
             <a:fld id="{A80E6DAD-F59F-4DF2-B36E-B1403061A098}" type="datetime1">
               <a:rPr lang="ko-KR" altLang="en-US" smtClean="0"/>
-              <a:t>2026-05-12</a:t>
+              <a:t>2026-05-13</a:t>
             </a:fld>
             <a:endParaRPr lang="ko-KR" altLang="en-US"/>
           </a:p>
@@ -2637,7 +2637,7 @@
           <a:p>
             <a:fld id="{65E7A435-D09E-4012-8A5A-CB367CE86DE7}" type="datetime1">
               <a:rPr lang="ko-KR" altLang="en-US" smtClean="0"/>
-              <a:t>2026-05-12</a:t>
+              <a:t>2026-05-13</a:t>
             </a:fld>
             <a:endParaRPr lang="ko-KR" altLang="en-US"/>
           </a:p>
@@ -3049,7 +3049,7 @@
           <a:p>
             <a:fld id="{EAEE4FE5-8155-4A7B-B9F1-1277B556A678}" type="datetime1">
               <a:rPr lang="ko-KR" altLang="en-US" smtClean="0"/>
-              <a:t>2026-05-12</a:t>
+              <a:t>2026-05-13</a:t>
             </a:fld>
             <a:endParaRPr lang="ko-KR" altLang="en-US"/>
           </a:p>
@@ -3190,7 +3190,7 @@
           <a:p>
             <a:fld id="{A5DDFFB1-F462-49A1-A952-F86898531EFC}" type="datetime1">
               <a:rPr lang="ko-KR" altLang="en-US" smtClean="0"/>
-              <a:t>2026-05-12</a:t>
+              <a:t>2026-05-13</a:t>
             </a:fld>
             <a:endParaRPr lang="ko-KR" altLang="en-US"/>
           </a:p>
@@ -3303,7 +3303,7 @@
           <a:p>
             <a:fld id="{DF307744-A7EE-42A9-B4BD-A75049B592B9}" type="datetime1">
               <a:rPr lang="ko-KR" altLang="en-US" smtClean="0"/>
-              <a:t>2026-05-12</a:t>
+              <a:t>2026-05-13</a:t>
             </a:fld>
             <a:endParaRPr lang="ko-KR" altLang="en-US"/>
           </a:p>
@@ -3614,7 +3614,7 @@
           <a:p>
             <a:fld id="{DEB58597-5F16-46FB-9810-19206F29ADC7}" type="datetime1">
               <a:rPr lang="ko-KR" altLang="en-US" smtClean="0"/>
-              <a:t>2026-05-12</a:t>
+              <a:t>2026-05-13</a:t>
             </a:fld>
             <a:endParaRPr lang="ko-KR" altLang="en-US"/>
           </a:p>
@@ -3855,7 +3855,7 @@
           <a:p>
             <a:fld id="{F9163AAC-BAFF-4F5F-9CEA-0445F100C3E2}" type="datetime1">
               <a:rPr lang="ko-KR" altLang="en-US" smtClean="0"/>
-              <a:t>2026-05-12</a:t>
+              <a:t>2026-05-13</a:t>
             </a:fld>
             <a:endParaRPr lang="ko-KR" altLang="en-US"/>
           </a:p>
@@ -4663,59 +4663,6 @@
               <a:rPr lang="ko-KR" altLang="en-US" dirty="0"/>
               <a:t>대기 시간 안에 죽이면 사라짐</a:t>
             </a:r>
-            <a:endParaRPr lang="en-US" altLang="ko-KR" dirty="0"/>
-          </a:p>
-          <a:p>
-            <a:pPr marL="0" indent="0">
-              <a:buNone/>
-            </a:pPr>
-            <a:r>
-              <a:rPr lang="ko-KR" altLang="en-US" dirty="0"/>
-              <a:t>죽여서 사라지거나</a:t>
-            </a:r>
-            <a:r>
-              <a:rPr lang="en-US" altLang="ko-KR" dirty="0"/>
-              <a:t>, </a:t>
-            </a:r>
-            <a:r>
-              <a:rPr lang="ko-KR" altLang="en-US" dirty="0"/>
-              <a:t>대기 시간이 종료돼서 사라지면</a:t>
-            </a:r>
-            <a:r>
-              <a:rPr lang="en-US" altLang="ko-KR" dirty="0"/>
-              <a:t>, 2</a:t>
-            </a:r>
-            <a:r>
-              <a:rPr lang="ko-KR" altLang="en-US" dirty="0"/>
-              <a:t>분이 지난 뒤부터 다시 </a:t>
-            </a:r>
-            <a:r>
-              <a:rPr lang="en-US" altLang="ko-KR" dirty="0"/>
-              <a:t>‘</a:t>
-            </a:r>
-            <a:r>
-              <a:rPr lang="ko-KR" altLang="en-US" dirty="0" err="1"/>
-              <a:t>스폰</a:t>
-            </a:r>
-            <a:r>
-              <a:rPr lang="ko-KR" altLang="en-US" dirty="0"/>
-              <a:t> 조건</a:t>
-            </a:r>
-            <a:r>
-              <a:rPr lang="en-US" altLang="ko-KR" dirty="0"/>
-              <a:t>‘</a:t>
-            </a:r>
-            <a:r>
-              <a:rPr lang="ko-KR" altLang="en-US" dirty="0"/>
-              <a:t>을 확인함</a:t>
-            </a:r>
-            <a:r>
-              <a:rPr lang="en-US" altLang="ko-KR" dirty="0"/>
-              <a:t>.</a:t>
-            </a:r>
-          </a:p>
-          <a:p>
-            <a:endParaRPr lang="ko-KR" altLang="en-US" dirty="0"/>
           </a:p>
         </p:txBody>
       </p:sp>
@@ -4911,7 +4858,7 @@
           <p:nvPr>
             <p:extLst>
               <p:ext uri="{D42A27DB-BD31-4B8C-83A1-F6EECF244321}">
-                <p14:modId xmlns:p14="http://schemas.microsoft.com/office/powerpoint/2010/main" val="398636817"/>
+                <p14:modId xmlns:p14="http://schemas.microsoft.com/office/powerpoint/2010/main" val="2192344924"/>
               </p:ext>
             </p:extLst>
           </p:nvPr>
@@ -5501,7 +5448,7 @@
                             <a:schemeClr val="tx1"/>
                           </a:solidFill>
                         </a:rPr>
-                        <a:t> 값의 합이 기준을 충족했는지 확인함 </a:t>
+                        <a:t>의 횟수가 기준을 충족했는지 확인함 </a:t>
                       </a:r>
                       <a:r>
                         <a:rPr lang="en-US" altLang="ko-KR" sz="1200" b="0" dirty="0">
@@ -6362,7 +6309,7 @@
           <p:nvPr>
             <p:extLst>
               <p:ext uri="{D42A27DB-BD31-4B8C-83A1-F6EECF244321}">
-                <p14:modId xmlns:p14="http://schemas.microsoft.com/office/powerpoint/2010/main" val="2000545552"/>
+                <p14:modId xmlns:p14="http://schemas.microsoft.com/office/powerpoint/2010/main" val="2371144216"/>
               </p:ext>
             </p:extLst>
           </p:nvPr>
@@ -7047,7 +6994,7 @@
                             <a:schemeClr val="tx1"/>
                           </a:solidFill>
                         </a:rPr>
-                        <a:t>3</a:t>
+                        <a:t>1</a:t>
                       </a:r>
                       <a:endParaRPr lang="ko-KR" altLang="en-US" sz="1200" b="0" dirty="0">
                         <a:solidFill>
@@ -7681,7 +7628,7 @@
                             <a:schemeClr val="tx1"/>
                           </a:solidFill>
                         </a:rPr>
-                        <a:t>값의 합 기준</a:t>
+                        <a:t>횟수 기준</a:t>
                       </a:r>
                     </a:p>
                   </a:txBody>
@@ -7741,7 +7688,7 @@
                             <a:schemeClr val="tx1"/>
                           </a:solidFill>
                         </a:rPr>
-                        <a:t>Float</a:t>
+                        <a:t>Int</a:t>
                       </a:r>
                       <a:endParaRPr lang="ko-KR" altLang="en-US" sz="1200" b="0" dirty="0">
                         <a:solidFill>
@@ -7804,7 +7751,7 @@
                             <a:schemeClr val="tx1"/>
                           </a:solidFill>
                         </a:rPr>
-                        <a:t>1.5</a:t>
+                        <a:t>5</a:t>
                       </a:r>
                       <a:endParaRPr lang="ko-KR" altLang="en-US" sz="1200" b="0" dirty="0">
                         <a:solidFill>
@@ -7945,7 +7892,7 @@
                             <a:schemeClr val="tx1"/>
                           </a:solidFill>
                         </a:rPr>
-                        <a:t>값의 합</a:t>
+                        <a:t>횟수</a:t>
                       </a:r>
                     </a:p>
                   </a:txBody>
@@ -8005,7 +7952,7 @@
                             <a:schemeClr val="tx1"/>
                           </a:solidFill>
                         </a:rPr>
-                        <a:t>Float</a:t>
+                        <a:t>int</a:t>
                       </a:r>
                       <a:endParaRPr lang="ko-KR" altLang="en-US" sz="1200" b="0" dirty="0">
                         <a:solidFill>
@@ -8068,7 +8015,7 @@
                             <a:schemeClr val="tx1"/>
                           </a:solidFill>
                         </a:rPr>
-                        <a:t>0.0</a:t>
+                        <a:t>0</a:t>
                       </a:r>
                       <a:endParaRPr lang="ko-KR" altLang="en-US" sz="1200" b="0" dirty="0">
                         <a:solidFill>
@@ -8126,12 +8073,20 @@
                     <a:p>
                       <a:pPr algn="l" latinLnBrk="0"/>
                       <a:r>
+                        <a:rPr lang="en-US" altLang="ko-KR" sz="1200" b="0" dirty="0">
+                          <a:solidFill>
+                            <a:schemeClr val="tx1"/>
+                          </a:solidFill>
+                        </a:rPr>
+                        <a:t>Idle</a:t>
+                      </a:r>
+                      <a:r>
                         <a:rPr lang="ko-KR" altLang="en-US" sz="1200" b="0" dirty="0">
                           <a:solidFill>
                             <a:schemeClr val="tx1"/>
                           </a:solidFill>
                         </a:rPr>
-                        <a:t>감정 값 서버로 보낼 때마다 더한다</a:t>
+                        <a:t>일 때부터 감정 값 서버로 보낼 때마다 더한다</a:t>
                       </a:r>
                       <a:r>
                         <a:rPr lang="en-US" altLang="ko-KR" sz="1200" b="0" dirty="0">
@@ -8784,7 +8739,9 @@
         </p:nvSpPr>
         <p:spPr/>
         <p:txBody>
-          <a:bodyPr/>
+          <a:bodyPr>
+            <a:normAutofit/>
+          </a:bodyPr>
           <a:lstStyle/>
           <a:p>
             <a:r>
@@ -8840,7 +8797,7 @@
             </a:r>
             <a:r>
               <a:rPr lang="ko-KR" altLang="en-US" sz="1600" dirty="0"/>
-              <a:t>의 값의 합이 기준</a:t>
+              <a:t>의 횟수가 기준</a:t>
             </a:r>
             <a:r>
               <a:rPr lang="en-US" altLang="ko-KR" sz="1600" dirty="0"/>
@@ -9048,50 +9005,50 @@
           <a:p>
             <a:pPr latinLnBrk="0"/>
             <a:r>
-              <a:rPr lang="en-US" altLang="ko-KR" dirty="0"/>
+              <a:rPr lang="en-US" altLang="ko-KR" sz="1600" dirty="0"/>
               <a:t>Die</a:t>
             </a:r>
             <a:r>
-              <a:rPr lang="ko-KR" altLang="en-US" dirty="0"/>
+              <a:rPr lang="ko-KR" altLang="en-US" sz="1600" dirty="0"/>
               <a:t>가 끝나면</a:t>
             </a:r>
             <a:r>
-              <a:rPr lang="en-US" altLang="ko-KR" dirty="0"/>
+              <a:rPr lang="en-US" altLang="ko-KR" sz="1600" dirty="0"/>
               <a:t>,</a:t>
             </a:r>
             <a:r>
-              <a:rPr lang="ko-KR" altLang="en-US" dirty="0"/>
+              <a:rPr lang="ko-KR" altLang="en-US" sz="1600" dirty="0"/>
               <a:t> </a:t>
             </a:r>
             <a:r>
-              <a:rPr lang="en-US" altLang="ko-KR" dirty="0"/>
+              <a:rPr lang="en-US" altLang="ko-KR" sz="1600" dirty="0"/>
               <a:t>Idle</a:t>
             </a:r>
             <a:r>
-              <a:rPr lang="ko-KR" altLang="en-US" dirty="0"/>
+              <a:rPr lang="ko-KR" altLang="en-US" sz="1600" dirty="0"/>
               <a:t>이 된다</a:t>
             </a:r>
             <a:r>
-              <a:rPr lang="en-US" altLang="ko-KR" dirty="0"/>
+              <a:rPr lang="en-US" altLang="ko-KR" sz="1600" dirty="0"/>
               <a:t>. </a:t>
             </a:r>
             <a:r>
-              <a:rPr lang="ko-KR" altLang="en-US" dirty="0"/>
+              <a:rPr lang="ko-KR" altLang="en-US" sz="1600" dirty="0"/>
               <a:t>이때 </a:t>
             </a:r>
             <a:r>
-              <a:rPr lang="ko-KR" altLang="en-US" dirty="0" err="1"/>
+              <a:rPr lang="ko-KR" altLang="en-US" sz="1600" dirty="0" err="1"/>
               <a:t>스탯을</a:t>
             </a:r>
             <a:r>
-              <a:rPr lang="ko-KR" altLang="en-US" dirty="0"/>
+              <a:rPr lang="ko-KR" altLang="en-US" sz="1600" dirty="0"/>
               <a:t> 초기화한다</a:t>
             </a:r>
             <a:r>
-              <a:rPr lang="en-US" altLang="ko-KR" dirty="0"/>
+              <a:rPr lang="en-US" altLang="ko-KR" sz="1600" dirty="0"/>
               <a:t>.</a:t>
             </a:r>
-            <a:endParaRPr lang="ko-KR" altLang="en-US" dirty="0"/>
+            <a:endParaRPr lang="ko-KR" altLang="en-US" sz="1600" dirty="0"/>
           </a:p>
         </p:txBody>
       </p:sp>

--- a/기획/몬스터 기획서_PollutionMonitor.pptx
+++ b/기획/몬스터 기획서_PollutionMonitor.pptx
@@ -230,7 +230,7 @@
           <a:p>
             <a:fld id="{90ADBB8C-8191-4AEC-B0E4-021A6DCC5E88}" type="datetimeFigureOut">
               <a:rPr lang="ko-KR" altLang="en-US" smtClean="0"/>
-              <a:t>2026-05-13</a:t>
+              <a:t>2026-05-18</a:t>
             </a:fld>
             <a:endParaRPr lang="ko-KR" altLang="en-US"/>
           </a:p>
@@ -407,7 +407,7 @@
           <a:p>
             <a:fld id="{9A139F74-74AF-4C37-AE84-1000E0D0E51D}" type="datetimeFigureOut">
               <a:rPr lang="ko-KR" altLang="en-US" smtClean="0"/>
-              <a:t>2026-05-13</a:t>
+              <a:t>2026-05-18</a:t>
             </a:fld>
             <a:endParaRPr lang="ko-KR" altLang="en-US"/>
           </a:p>
@@ -821,7 +821,7 @@
           <a:p>
             <a:fld id="{FBFF74CB-B97E-448A-8613-336F71D317F5}" type="datetime1">
               <a:rPr lang="ko-KR" altLang="en-US" smtClean="0"/>
-              <a:t>2026-05-13</a:t>
+              <a:t>2026-05-18</a:t>
             </a:fld>
             <a:endParaRPr lang="ko-KR" altLang="en-US"/>
           </a:p>
@@ -1112,7 +1112,7 @@
           <a:p>
             <a:fld id="{6D5A3F2E-880D-4AB2-BE87-1DABB4D9D36B}" type="datetime1">
               <a:rPr lang="ko-KR" altLang="en-US" smtClean="0"/>
-              <a:t>2026-05-13</a:t>
+              <a:t>2026-05-18</a:t>
             </a:fld>
             <a:endParaRPr lang="ko-KR" altLang="en-US"/>
           </a:p>
@@ -1310,7 +1310,7 @@
           <a:p>
             <a:fld id="{E225792B-2F2C-46B3-9536-A6BE584A3133}" type="datetime1">
               <a:rPr lang="ko-KR" altLang="en-US" smtClean="0"/>
-              <a:t>2026-05-13</a:t>
+              <a:t>2026-05-18</a:t>
             </a:fld>
             <a:endParaRPr lang="ko-KR" altLang="en-US"/>
           </a:p>
@@ -1518,7 +1518,7 @@
           <a:p>
             <a:fld id="{B959B1C4-1FB0-4ED1-88EC-81D9419D81DC}" type="datetime1">
               <a:rPr lang="ko-KR" altLang="en-US" smtClean="0"/>
-              <a:t>2026-05-13</a:t>
+              <a:t>2026-05-18</a:t>
             </a:fld>
             <a:endParaRPr lang="ko-KR" altLang="en-US"/>
           </a:p>
@@ -1789,7 +1789,7 @@
           <a:p>
             <a:fld id="{644DB65B-E6AE-4B39-8D08-8DC3DC9B3DE6}" type="datetime1">
               <a:rPr lang="ko-KR" altLang="en-US" smtClean="0"/>
-              <a:t>2026-05-13</a:t>
+              <a:t>2026-05-18</a:t>
             </a:fld>
             <a:endParaRPr lang="ko-KR" altLang="en-US"/>
           </a:p>
@@ -2060,7 +2060,7 @@
           <a:p>
             <a:fld id="{644DB65B-E6AE-4B39-8D08-8DC3DC9B3DE6}" type="datetime1">
               <a:rPr lang="ko-KR" altLang="en-US" smtClean="0"/>
-              <a:t>2026-05-13</a:t>
+              <a:t>2026-05-18</a:t>
             </a:fld>
             <a:endParaRPr lang="ko-KR" altLang="en-US"/>
           </a:p>
@@ -2372,7 +2372,7 @@
           <a:p>
             <a:fld id="{A80E6DAD-F59F-4DF2-B36E-B1403061A098}" type="datetime1">
               <a:rPr lang="ko-KR" altLang="en-US" smtClean="0"/>
-              <a:t>2026-05-13</a:t>
+              <a:t>2026-05-18</a:t>
             </a:fld>
             <a:endParaRPr lang="ko-KR" altLang="en-US"/>
           </a:p>
@@ -2637,7 +2637,7 @@
           <a:p>
             <a:fld id="{65E7A435-D09E-4012-8A5A-CB367CE86DE7}" type="datetime1">
               <a:rPr lang="ko-KR" altLang="en-US" smtClean="0"/>
-              <a:t>2026-05-13</a:t>
+              <a:t>2026-05-18</a:t>
             </a:fld>
             <a:endParaRPr lang="ko-KR" altLang="en-US"/>
           </a:p>
@@ -3049,7 +3049,7 @@
           <a:p>
             <a:fld id="{EAEE4FE5-8155-4A7B-B9F1-1277B556A678}" type="datetime1">
               <a:rPr lang="ko-KR" altLang="en-US" smtClean="0"/>
-              <a:t>2026-05-13</a:t>
+              <a:t>2026-05-18</a:t>
             </a:fld>
             <a:endParaRPr lang="ko-KR" altLang="en-US"/>
           </a:p>
@@ -3190,7 +3190,7 @@
           <a:p>
             <a:fld id="{A5DDFFB1-F462-49A1-A952-F86898531EFC}" type="datetime1">
               <a:rPr lang="ko-KR" altLang="en-US" smtClean="0"/>
-              <a:t>2026-05-13</a:t>
+              <a:t>2026-05-18</a:t>
             </a:fld>
             <a:endParaRPr lang="ko-KR" altLang="en-US"/>
           </a:p>
@@ -3303,7 +3303,7 @@
           <a:p>
             <a:fld id="{DF307744-A7EE-42A9-B4BD-A75049B592B9}" type="datetime1">
               <a:rPr lang="ko-KR" altLang="en-US" smtClean="0"/>
-              <a:t>2026-05-13</a:t>
+              <a:t>2026-05-18</a:t>
             </a:fld>
             <a:endParaRPr lang="ko-KR" altLang="en-US"/>
           </a:p>
@@ -3614,7 +3614,7 @@
           <a:p>
             <a:fld id="{DEB58597-5F16-46FB-9810-19206F29ADC7}" type="datetime1">
               <a:rPr lang="ko-KR" altLang="en-US" smtClean="0"/>
-              <a:t>2026-05-13</a:t>
+              <a:t>2026-05-18</a:t>
             </a:fld>
             <a:endParaRPr lang="ko-KR" altLang="en-US"/>
           </a:p>
@@ -3855,7 +3855,7 @@
           <a:p>
             <a:fld id="{F9163AAC-BAFF-4F5F-9CEA-0445F100C3E2}" type="datetime1">
               <a:rPr lang="ko-KR" altLang="en-US" smtClean="0"/>
-              <a:t>2026-05-13</a:t>
+              <a:t>2026-05-18</a:t>
             </a:fld>
             <a:endParaRPr lang="ko-KR" altLang="en-US"/>
           </a:p>
@@ -6309,14 +6309,14 @@
           <p:nvPr>
             <p:extLst>
               <p:ext uri="{D42A27DB-BD31-4B8C-83A1-F6EECF244321}">
-                <p14:modId xmlns:p14="http://schemas.microsoft.com/office/powerpoint/2010/main" val="2371144216"/>
+                <p14:modId xmlns:p14="http://schemas.microsoft.com/office/powerpoint/2010/main" val="3591427810"/>
               </p:ext>
             </p:extLst>
           </p:nvPr>
         </p:nvGraphicFramePr>
         <p:xfrm>
           <a:off x="1892298" y="3643408"/>
-          <a:ext cx="7575854" cy="2581231"/>
+          <a:ext cx="7575854" cy="2884664"/>
         </p:xfrm>
         <a:graphic>
           <a:graphicData uri="http://schemas.openxmlformats.org/drawingml/2006/table">
@@ -7103,6 +7103,254 @@
                 <a:extLst>
                   <a:ext uri="{0D108BD9-81ED-4DB2-BD59-A6C34878D82A}">
                     <a16:rowId xmlns:a16="http://schemas.microsoft.com/office/drawing/2014/main" val="2549169645"/>
+                  </a:ext>
+                </a:extLst>
+              </a:tr>
+              <a:tr h="303433">
+                <a:tc>
+                  <a:txBody>
+                    <a:bodyPr/>
+                    <a:lstStyle/>
+                    <a:p>
+                      <a:pPr algn="l" latinLnBrk="0"/>
+                      <a:r>
+                        <a:rPr lang="ko-KR" altLang="en-US" sz="1200" b="1" dirty="0">
+                          <a:solidFill>
+                            <a:schemeClr val="tx1"/>
+                          </a:solidFill>
+                        </a:rPr>
+                        <a:t>파워 레벨</a:t>
+                      </a:r>
+                    </a:p>
+                  </a:txBody>
+                  <a:tcPr anchor="ctr">
+                    <a:lnL w="12700" cap="flat" cmpd="sng" algn="ctr">
+                      <a:solidFill>
+                        <a:schemeClr val="tx1"/>
+                      </a:solidFill>
+                      <a:prstDash val="solid"/>
+                      <a:round/>
+                      <a:headEnd type="none" w="med" len="med"/>
+                      <a:tailEnd type="none" w="med" len="med"/>
+                    </a:lnL>
+                    <a:lnR w="12700" cap="flat" cmpd="sng" algn="ctr">
+                      <a:solidFill>
+                        <a:schemeClr val="tx1"/>
+                      </a:solidFill>
+                      <a:prstDash val="solid"/>
+                      <a:round/>
+                      <a:headEnd type="none" w="med" len="med"/>
+                      <a:tailEnd type="none" w="med" len="med"/>
+                    </a:lnR>
+                    <a:lnT w="12700" cap="flat" cmpd="sng" algn="ctr">
+                      <a:solidFill>
+                        <a:schemeClr val="tx1"/>
+                      </a:solidFill>
+                      <a:prstDash val="solid"/>
+                      <a:round/>
+                      <a:headEnd type="none" w="med" len="med"/>
+                      <a:tailEnd type="none" w="med" len="med"/>
+                    </a:lnT>
+                    <a:lnB w="12700" cap="flat" cmpd="sng" algn="ctr">
+                      <a:solidFill>
+                        <a:schemeClr val="tx1"/>
+                      </a:solidFill>
+                      <a:prstDash val="solid"/>
+                      <a:round/>
+                      <a:headEnd type="none" w="med" len="med"/>
+                      <a:tailEnd type="none" w="med" len="med"/>
+                    </a:lnB>
+                    <a:solidFill>
+                      <a:schemeClr val="bg1">
+                        <a:lumMod val="85000"/>
+                      </a:schemeClr>
+                    </a:solidFill>
+                  </a:tcPr>
+                </a:tc>
+                <a:tc>
+                  <a:txBody>
+                    <a:bodyPr/>
+                    <a:lstStyle/>
+                    <a:p>
+                      <a:pPr algn="ctr" latinLnBrk="0"/>
+                      <a:r>
+                        <a:rPr lang="en-US" altLang="ko-KR" sz="1200" b="0" dirty="0">
+                          <a:solidFill>
+                            <a:schemeClr val="tx1"/>
+                          </a:solidFill>
+                        </a:rPr>
+                        <a:t>int</a:t>
+                      </a:r>
+                      <a:endParaRPr lang="ko-KR" altLang="en-US" sz="1200" b="0" dirty="0">
+                        <a:solidFill>
+                          <a:schemeClr val="tx1"/>
+                        </a:solidFill>
+                      </a:endParaRPr>
+                    </a:p>
+                  </a:txBody>
+                  <a:tcPr anchor="ctr">
+                    <a:lnL w="12700" cap="flat" cmpd="sng" algn="ctr">
+                      <a:solidFill>
+                        <a:schemeClr val="tx1"/>
+                      </a:solidFill>
+                      <a:prstDash val="solid"/>
+                      <a:round/>
+                      <a:headEnd type="none" w="med" len="med"/>
+                      <a:tailEnd type="none" w="med" len="med"/>
+                    </a:lnL>
+                    <a:lnR w="12700" cap="flat" cmpd="sng" algn="ctr">
+                      <a:solidFill>
+                        <a:schemeClr val="tx1"/>
+                      </a:solidFill>
+                      <a:prstDash val="solid"/>
+                      <a:round/>
+                      <a:headEnd type="none" w="med" len="med"/>
+                      <a:tailEnd type="none" w="med" len="med"/>
+                    </a:lnR>
+                    <a:lnT w="12700" cap="flat" cmpd="sng" algn="ctr">
+                      <a:solidFill>
+                        <a:schemeClr val="tx1"/>
+                      </a:solidFill>
+                      <a:prstDash val="solid"/>
+                      <a:round/>
+                      <a:headEnd type="none" w="med" len="med"/>
+                      <a:tailEnd type="none" w="med" len="med"/>
+                    </a:lnT>
+                    <a:lnB w="12700" cap="flat" cmpd="sng" algn="ctr">
+                      <a:solidFill>
+                        <a:schemeClr val="tx1"/>
+                      </a:solidFill>
+                      <a:prstDash val="solid"/>
+                      <a:round/>
+                      <a:headEnd type="none" w="med" len="med"/>
+                      <a:tailEnd type="none" w="med" len="med"/>
+                    </a:lnB>
+                    <a:solidFill>
+                      <a:schemeClr val="bg1"/>
+                    </a:solidFill>
+                  </a:tcPr>
+                </a:tc>
+                <a:tc>
+                  <a:txBody>
+                    <a:bodyPr/>
+                    <a:lstStyle/>
+                    <a:p>
+                      <a:pPr algn="ctr" latinLnBrk="0"/>
+                      <a:r>
+                        <a:rPr lang="en-US" altLang="ko-KR" sz="1200" b="0">
+                          <a:solidFill>
+                            <a:schemeClr val="tx1"/>
+                          </a:solidFill>
+                        </a:rPr>
+                        <a:t>5</a:t>
+                      </a:r>
+                      <a:endParaRPr lang="ko-KR" altLang="en-US" sz="1200" b="0" dirty="0">
+                        <a:solidFill>
+                          <a:schemeClr val="tx1"/>
+                        </a:solidFill>
+                      </a:endParaRPr>
+                    </a:p>
+                  </a:txBody>
+                  <a:tcPr anchor="ctr">
+                    <a:lnL w="12700" cap="flat" cmpd="sng" algn="ctr">
+                      <a:solidFill>
+                        <a:schemeClr val="tx1"/>
+                      </a:solidFill>
+                      <a:prstDash val="solid"/>
+                      <a:round/>
+                      <a:headEnd type="none" w="med" len="med"/>
+                      <a:tailEnd type="none" w="med" len="med"/>
+                    </a:lnL>
+                    <a:lnR w="12700" cap="flat" cmpd="sng" algn="ctr">
+                      <a:solidFill>
+                        <a:schemeClr val="tx1"/>
+                      </a:solidFill>
+                      <a:prstDash val="solid"/>
+                      <a:round/>
+                      <a:headEnd type="none" w="med" len="med"/>
+                      <a:tailEnd type="none" w="med" len="med"/>
+                    </a:lnR>
+                    <a:lnT w="12700" cap="flat" cmpd="sng" algn="ctr">
+                      <a:solidFill>
+                        <a:schemeClr val="tx1"/>
+                      </a:solidFill>
+                      <a:prstDash val="solid"/>
+                      <a:round/>
+                      <a:headEnd type="none" w="med" len="med"/>
+                      <a:tailEnd type="none" w="med" len="med"/>
+                    </a:lnT>
+                    <a:lnB w="12700" cap="flat" cmpd="sng" algn="ctr">
+                      <a:solidFill>
+                        <a:schemeClr val="tx1"/>
+                      </a:solidFill>
+                      <a:prstDash val="solid"/>
+                      <a:round/>
+                      <a:headEnd type="none" w="med" len="med"/>
+                      <a:tailEnd type="none" w="med" len="med"/>
+                    </a:lnB>
+                    <a:solidFill>
+                      <a:schemeClr val="bg1"/>
+                    </a:solidFill>
+                  </a:tcPr>
+                </a:tc>
+                <a:tc>
+                  <a:txBody>
+                    <a:bodyPr/>
+                    <a:lstStyle/>
+                    <a:p>
+                      <a:pPr algn="l" latinLnBrk="0"/>
+                      <a:endParaRPr lang="ko-KR" altLang="en-US" sz="1200" b="0" dirty="0">
+                        <a:solidFill>
+                          <a:schemeClr val="tx1"/>
+                        </a:solidFill>
+                      </a:endParaRPr>
+                    </a:p>
+                  </a:txBody>
+                  <a:tcPr anchor="ctr">
+                    <a:lnL w="12700" cap="flat" cmpd="sng" algn="ctr">
+                      <a:solidFill>
+                        <a:schemeClr val="tx1"/>
+                      </a:solidFill>
+                      <a:prstDash val="solid"/>
+                      <a:round/>
+                      <a:headEnd type="none" w="med" len="med"/>
+                      <a:tailEnd type="none" w="med" len="med"/>
+                    </a:lnL>
+                    <a:lnR w="12700" cap="flat" cmpd="sng" algn="ctr">
+                      <a:solidFill>
+                        <a:schemeClr val="tx1"/>
+                      </a:solidFill>
+                      <a:prstDash val="solid"/>
+                      <a:round/>
+                      <a:headEnd type="none" w="med" len="med"/>
+                      <a:tailEnd type="none" w="med" len="med"/>
+                    </a:lnR>
+                    <a:lnT w="12700" cap="flat" cmpd="sng" algn="ctr">
+                      <a:solidFill>
+                        <a:schemeClr val="tx1"/>
+                      </a:solidFill>
+                      <a:prstDash val="solid"/>
+                      <a:round/>
+                      <a:headEnd type="none" w="med" len="med"/>
+                      <a:tailEnd type="none" w="med" len="med"/>
+                    </a:lnT>
+                    <a:lnB w="12700" cap="flat" cmpd="sng" algn="ctr">
+                      <a:solidFill>
+                        <a:schemeClr val="tx1"/>
+                      </a:solidFill>
+                      <a:prstDash val="solid"/>
+                      <a:round/>
+                      <a:headEnd type="none" w="med" len="med"/>
+                      <a:tailEnd type="none" w="med" len="med"/>
+                    </a:lnB>
+                    <a:solidFill>
+                      <a:schemeClr val="bg1"/>
+                    </a:solidFill>
+                  </a:tcPr>
+                </a:tc>
+                <a:extLst>
+                  <a:ext uri="{0D108BD9-81ED-4DB2-BD59-A6C34878D82A}">
+                    <a16:rowId xmlns:a16="http://schemas.microsoft.com/office/drawing/2014/main" val="3177080359"/>
                   </a:ext>
                 </a:extLst>
               </a:tr>

--- a/기획/몬스터 기획서_PollutionMonitor.pptx
+++ b/기획/몬스터 기획서_PollutionMonitor.pptx
@@ -5,17 +5,18 @@
     <p:sldMasterId id="2147483648" r:id="rId1"/>
   </p:sldMasterIdLst>
   <p:notesMasterIdLst>
-    <p:notesMasterId r:id="rId7"/>
+    <p:notesMasterId r:id="rId8"/>
   </p:notesMasterIdLst>
   <p:handoutMasterIdLst>
-    <p:handoutMasterId r:id="rId8"/>
+    <p:handoutMasterId r:id="rId9"/>
   </p:handoutMasterIdLst>
   <p:sldIdLst>
     <p:sldId id="256" r:id="rId2"/>
-    <p:sldId id="285" r:id="rId3"/>
-    <p:sldId id="276" r:id="rId4"/>
-    <p:sldId id="283" r:id="rId5"/>
-    <p:sldId id="286" r:id="rId6"/>
+    <p:sldId id="287" r:id="rId3"/>
+    <p:sldId id="285" r:id="rId4"/>
+    <p:sldId id="276" r:id="rId5"/>
+    <p:sldId id="283" r:id="rId6"/>
+    <p:sldId id="286" r:id="rId7"/>
   </p:sldIdLst>
   <p:sldSz cx="12192000" cy="6858000"/>
   <p:notesSz cx="6858000" cy="9144000"/>
@@ -230,7 +231,7 @@
           <a:p>
             <a:fld id="{90ADBB8C-8191-4AEC-B0E4-021A6DCC5E88}" type="datetimeFigureOut">
               <a:rPr lang="ko-KR" altLang="en-US" smtClean="0"/>
-              <a:t>2026-05-18</a:t>
+              <a:t>2026-05-26</a:t>
             </a:fld>
             <a:endParaRPr lang="ko-KR" altLang="en-US"/>
           </a:p>
@@ -407,7 +408,7 @@
           <a:p>
             <a:fld id="{9A139F74-74AF-4C37-AE84-1000E0D0E51D}" type="datetimeFigureOut">
               <a:rPr lang="ko-KR" altLang="en-US" smtClean="0"/>
-              <a:t>2026-05-18</a:t>
+              <a:t>2026-05-26</a:t>
             </a:fld>
             <a:endParaRPr lang="ko-KR" altLang="en-US"/>
           </a:p>
@@ -821,7 +822,7 @@
           <a:p>
             <a:fld id="{FBFF74CB-B97E-448A-8613-336F71D317F5}" type="datetime1">
               <a:rPr lang="ko-KR" altLang="en-US" smtClean="0"/>
-              <a:t>2026-05-18</a:t>
+              <a:t>2026-05-26</a:t>
             </a:fld>
             <a:endParaRPr lang="ko-KR" altLang="en-US"/>
           </a:p>
@@ -1112,7 +1113,7 @@
           <a:p>
             <a:fld id="{6D5A3F2E-880D-4AB2-BE87-1DABB4D9D36B}" type="datetime1">
               <a:rPr lang="ko-KR" altLang="en-US" smtClean="0"/>
-              <a:t>2026-05-18</a:t>
+              <a:t>2026-05-26</a:t>
             </a:fld>
             <a:endParaRPr lang="ko-KR" altLang="en-US"/>
           </a:p>
@@ -1310,7 +1311,7 @@
           <a:p>
             <a:fld id="{E225792B-2F2C-46B3-9536-A6BE584A3133}" type="datetime1">
               <a:rPr lang="ko-KR" altLang="en-US" smtClean="0"/>
-              <a:t>2026-05-18</a:t>
+              <a:t>2026-05-26</a:t>
             </a:fld>
             <a:endParaRPr lang="ko-KR" altLang="en-US"/>
           </a:p>
@@ -1518,7 +1519,7 @@
           <a:p>
             <a:fld id="{B959B1C4-1FB0-4ED1-88EC-81D9419D81DC}" type="datetime1">
               <a:rPr lang="ko-KR" altLang="en-US" smtClean="0"/>
-              <a:t>2026-05-18</a:t>
+              <a:t>2026-05-26</a:t>
             </a:fld>
             <a:endParaRPr lang="ko-KR" altLang="en-US"/>
           </a:p>
@@ -1789,7 +1790,7 @@
           <a:p>
             <a:fld id="{644DB65B-E6AE-4B39-8D08-8DC3DC9B3DE6}" type="datetime1">
               <a:rPr lang="ko-KR" altLang="en-US" smtClean="0"/>
-              <a:t>2026-05-18</a:t>
+              <a:t>2026-05-26</a:t>
             </a:fld>
             <a:endParaRPr lang="ko-KR" altLang="en-US"/>
           </a:p>
@@ -2060,7 +2061,7 @@
           <a:p>
             <a:fld id="{644DB65B-E6AE-4B39-8D08-8DC3DC9B3DE6}" type="datetime1">
               <a:rPr lang="ko-KR" altLang="en-US" smtClean="0"/>
-              <a:t>2026-05-18</a:t>
+              <a:t>2026-05-26</a:t>
             </a:fld>
             <a:endParaRPr lang="ko-KR" altLang="en-US"/>
           </a:p>
@@ -2372,7 +2373,7 @@
           <a:p>
             <a:fld id="{A80E6DAD-F59F-4DF2-B36E-B1403061A098}" type="datetime1">
               <a:rPr lang="ko-KR" altLang="en-US" smtClean="0"/>
-              <a:t>2026-05-18</a:t>
+              <a:t>2026-05-26</a:t>
             </a:fld>
             <a:endParaRPr lang="ko-KR" altLang="en-US"/>
           </a:p>
@@ -2637,7 +2638,7 @@
           <a:p>
             <a:fld id="{65E7A435-D09E-4012-8A5A-CB367CE86DE7}" type="datetime1">
               <a:rPr lang="ko-KR" altLang="en-US" smtClean="0"/>
-              <a:t>2026-05-18</a:t>
+              <a:t>2026-05-26</a:t>
             </a:fld>
             <a:endParaRPr lang="ko-KR" altLang="en-US"/>
           </a:p>
@@ -3049,7 +3050,7 @@
           <a:p>
             <a:fld id="{EAEE4FE5-8155-4A7B-B9F1-1277B556A678}" type="datetime1">
               <a:rPr lang="ko-KR" altLang="en-US" smtClean="0"/>
-              <a:t>2026-05-18</a:t>
+              <a:t>2026-05-26</a:t>
             </a:fld>
             <a:endParaRPr lang="ko-KR" altLang="en-US"/>
           </a:p>
@@ -3190,7 +3191,7 @@
           <a:p>
             <a:fld id="{A5DDFFB1-F462-49A1-A952-F86898531EFC}" type="datetime1">
               <a:rPr lang="ko-KR" altLang="en-US" smtClean="0"/>
-              <a:t>2026-05-18</a:t>
+              <a:t>2026-05-26</a:t>
             </a:fld>
             <a:endParaRPr lang="ko-KR" altLang="en-US"/>
           </a:p>
@@ -3303,7 +3304,7 @@
           <a:p>
             <a:fld id="{DF307744-A7EE-42A9-B4BD-A75049B592B9}" type="datetime1">
               <a:rPr lang="ko-KR" altLang="en-US" smtClean="0"/>
-              <a:t>2026-05-18</a:t>
+              <a:t>2026-05-26</a:t>
             </a:fld>
             <a:endParaRPr lang="ko-KR" altLang="en-US"/>
           </a:p>
@@ -3614,7 +3615,7 @@
           <a:p>
             <a:fld id="{DEB58597-5F16-46FB-9810-19206F29ADC7}" type="datetime1">
               <a:rPr lang="ko-KR" altLang="en-US" smtClean="0"/>
-              <a:t>2026-05-18</a:t>
+              <a:t>2026-05-26</a:t>
             </a:fld>
             <a:endParaRPr lang="ko-KR" altLang="en-US"/>
           </a:p>
@@ -3855,7 +3856,7 @@
           <a:p>
             <a:fld id="{F9163AAC-BAFF-4F5F-9CEA-0445F100C3E2}" type="datetime1">
               <a:rPr lang="ko-KR" altLang="en-US" smtClean="0"/>
-              <a:t>2026-05-18</a:t>
+              <a:t>2026-05-26</a:t>
             </a:fld>
             <a:endParaRPr lang="ko-KR" altLang="en-US"/>
           </a:p>
@@ -4432,6 +4433,233 @@
           <p:cNvPr id="2" name="텍스트 개체 틀 1">
             <a:extLst>
               <a:ext uri="{FF2B5EF4-FFF2-40B4-BE49-F238E27FC236}">
+                <a16:creationId xmlns:a16="http://schemas.microsoft.com/office/drawing/2014/main" id="{2DE27613-DF64-6AEC-44DB-E41303EAF080}"/>
+              </a:ext>
+            </a:extLst>
+          </p:cNvPr>
+          <p:cNvSpPr>
+            <a:spLocks noGrp="1"/>
+          </p:cNvSpPr>
+          <p:nvPr>
+            <p:ph type="body" sz="quarter" idx="13"/>
+          </p:nvPr>
+        </p:nvSpPr>
+        <p:spPr/>
+        <p:txBody>
+          <a:bodyPr/>
+          <a:lstStyle/>
+          <a:p>
+            <a:endParaRPr lang="ko-KR" altLang="en-US"/>
+          </a:p>
+        </p:txBody>
+      </p:sp>
+      <p:sp>
+        <p:nvSpPr>
+          <p:cNvPr id="3" name="제목 2">
+            <a:extLst>
+              <a:ext uri="{FF2B5EF4-FFF2-40B4-BE49-F238E27FC236}">
+                <a16:creationId xmlns:a16="http://schemas.microsoft.com/office/drawing/2014/main" id="{1A7071E3-36E2-32DD-49A2-B70E62B8E098}"/>
+              </a:ext>
+            </a:extLst>
+          </p:cNvPr>
+          <p:cNvSpPr>
+            <a:spLocks noGrp="1"/>
+          </p:cNvSpPr>
+          <p:nvPr>
+            <p:ph type="title"/>
+          </p:nvPr>
+        </p:nvSpPr>
+        <p:spPr>
+          <a:xfrm>
+            <a:off x="0" y="119158"/>
+            <a:ext cx="1600200" cy="978729"/>
+          </a:xfrm>
+        </p:spPr>
+        <p:txBody>
+          <a:bodyPr/>
+          <a:lstStyle/>
+          <a:p>
+            <a:r>
+              <a:rPr lang="ko-KR" altLang="en-US" dirty="0"/>
+              <a:t>몬스터 사이즈</a:t>
+            </a:r>
+          </a:p>
+        </p:txBody>
+      </p:sp>
+      <p:sp>
+        <p:nvSpPr>
+          <p:cNvPr id="4" name="내용 개체 틀 3">
+            <a:extLst>
+              <a:ext uri="{FF2B5EF4-FFF2-40B4-BE49-F238E27FC236}">
+                <a16:creationId xmlns:a16="http://schemas.microsoft.com/office/drawing/2014/main" id="{D0D7CE66-3B3F-075D-E1BE-02966ABAA858}"/>
+              </a:ext>
+            </a:extLst>
+          </p:cNvPr>
+          <p:cNvSpPr>
+            <a:spLocks noGrp="1"/>
+          </p:cNvSpPr>
+          <p:nvPr>
+            <p:ph idx="1"/>
+          </p:nvPr>
+        </p:nvSpPr>
+        <p:spPr/>
+        <p:txBody>
+          <a:bodyPr/>
+          <a:lstStyle/>
+          <a:p>
+            <a:endParaRPr lang="ko-KR" altLang="en-US"/>
+          </a:p>
+        </p:txBody>
+      </p:sp>
+      <p:sp>
+        <p:nvSpPr>
+          <p:cNvPr id="5" name="슬라이드 번호 개체 틀 4">
+            <a:extLst>
+              <a:ext uri="{FF2B5EF4-FFF2-40B4-BE49-F238E27FC236}">
+                <a16:creationId xmlns:a16="http://schemas.microsoft.com/office/drawing/2014/main" id="{0A6C1605-8CAB-4E3F-42D7-4D227F91A7B3}"/>
+              </a:ext>
+            </a:extLst>
+          </p:cNvPr>
+          <p:cNvSpPr>
+            <a:spLocks noGrp="1"/>
+          </p:cNvSpPr>
+          <p:nvPr>
+            <p:ph type="sldNum" sz="quarter" idx="12"/>
+          </p:nvPr>
+        </p:nvSpPr>
+        <p:spPr/>
+        <p:txBody>
+          <a:bodyPr/>
+          <a:lstStyle/>
+          <a:p>
+            <a:fld id="{2A226FEB-661D-4181-84CB-C53DCFE1931A}" type="slidenum">
+              <a:rPr lang="ko-KR" altLang="en-US" smtClean="0"/>
+              <a:t>2</a:t>
+            </a:fld>
+            <a:endParaRPr lang="ko-KR" altLang="en-US"/>
+          </a:p>
+        </p:txBody>
+      </p:sp>
+      <p:pic>
+        <p:nvPicPr>
+          <p:cNvPr id="7" name="그림 6">
+            <a:extLst>
+              <a:ext uri="{FF2B5EF4-FFF2-40B4-BE49-F238E27FC236}">
+                <a16:creationId xmlns:a16="http://schemas.microsoft.com/office/drawing/2014/main" id="{563F831B-9825-15DA-0BF9-2C9E6AE4BD1F}"/>
+              </a:ext>
+            </a:extLst>
+          </p:cNvPr>
+          <p:cNvPicPr>
+            <a:picLocks noChangeAspect="1"/>
+          </p:cNvPicPr>
+          <p:nvPr/>
+        </p:nvPicPr>
+        <p:blipFill>
+          <a:blip r:embed="rId2"/>
+          <a:stretch>
+            <a:fillRect/>
+          </a:stretch>
+        </p:blipFill>
+        <p:spPr>
+          <a:xfrm>
+            <a:off x="1892300" y="119158"/>
+            <a:ext cx="4438650" cy="5610225"/>
+          </a:xfrm>
+          <a:prstGeom prst="rect">
+            <a:avLst/>
+          </a:prstGeom>
+        </p:spPr>
+      </p:pic>
+      <p:sp>
+        <p:nvSpPr>
+          <p:cNvPr id="10" name="제목 2">
+            <a:extLst>
+              <a:ext uri="{FF2B5EF4-FFF2-40B4-BE49-F238E27FC236}">
+                <a16:creationId xmlns:a16="http://schemas.microsoft.com/office/drawing/2014/main" id="{BA36012C-D2B2-6673-E9ED-D566DE11534B}"/>
+              </a:ext>
+            </a:extLst>
+          </p:cNvPr>
+          <p:cNvSpPr txBox="1">
+            <a:spLocks/>
+          </p:cNvSpPr>
+          <p:nvPr/>
+        </p:nvSpPr>
+        <p:spPr>
+          <a:xfrm>
+            <a:off x="6474373" y="429213"/>
+            <a:ext cx="3631324" cy="535531"/>
+          </a:xfrm>
+          <a:prstGeom prst="rect">
+            <a:avLst/>
+          </a:prstGeom>
+        </p:spPr>
+        <p:txBody>
+          <a:bodyPr vert="horz" wrap="square" lIns="91440" tIns="45720" rIns="91440" bIns="45720" rtlCol="0" anchor="t">
+            <a:spAutoFit/>
+          </a:bodyPr>
+          <a:lstStyle>
+            <a:lvl1pPr algn="l" defTabSz="914400" rtl="0" eaLnBrk="1" latinLnBrk="0" hangingPunct="1">
+              <a:lnSpc>
+                <a:spcPct val="90000"/>
+              </a:lnSpc>
+              <a:spcBef>
+                <a:spcPct val="0"/>
+              </a:spcBef>
+              <a:buNone/>
+              <a:defRPr sz="3200" b="1" kern="1200">
+                <a:solidFill>
+                  <a:schemeClr val="tx1"/>
+                </a:solidFill>
+                <a:latin typeface="+mj-lt"/>
+                <a:ea typeface="+mj-ea"/>
+                <a:cs typeface="+mj-cs"/>
+              </a:defRPr>
+            </a:lvl1pPr>
+          </a:lstStyle>
+          <a:p>
+            <a:r>
+              <a:rPr lang="en-US" altLang="ko-KR" b="0"/>
+              <a:t>88, 84, 234</a:t>
+            </a:r>
+            <a:endParaRPr lang="ko-KR" altLang="en-US" b="0" dirty="0"/>
+          </a:p>
+        </p:txBody>
+      </p:sp>
+    </p:spTree>
+    <p:extLst>
+      <p:ext uri="{BB962C8B-B14F-4D97-AF65-F5344CB8AC3E}">
+        <p14:creationId xmlns:p14="http://schemas.microsoft.com/office/powerpoint/2010/main" val="1605597036"/>
+      </p:ext>
+    </p:extLst>
+  </p:cSld>
+  <p:clrMapOvr>
+    <a:masterClrMapping/>
+  </p:clrMapOvr>
+</p:sld>
+</file>
+
+<file path=ppt/slides/slide3.xml><?xml version="1.0" encoding="utf-8"?>
+<p:sld xmlns:a="http://schemas.openxmlformats.org/drawingml/2006/main" xmlns:r="http://schemas.openxmlformats.org/officeDocument/2006/relationships" xmlns:p="http://schemas.openxmlformats.org/presentationml/2006/main">
+  <p:cSld>
+    <p:spTree>
+      <p:nvGrpSpPr>
+        <p:cNvPr id="1" name=""/>
+        <p:cNvGrpSpPr/>
+        <p:nvPr/>
+      </p:nvGrpSpPr>
+      <p:grpSpPr>
+        <a:xfrm>
+          <a:off x="0" y="0"/>
+          <a:ext cx="0" cy="0"/>
+          <a:chOff x="0" y="0"/>
+          <a:chExt cx="0" cy="0"/>
+        </a:xfrm>
+      </p:grpSpPr>
+      <p:sp>
+        <p:nvSpPr>
+          <p:cNvPr id="2" name="텍스트 개체 틀 1">
+            <a:extLst>
+              <a:ext uri="{FF2B5EF4-FFF2-40B4-BE49-F238E27FC236}">
                 <a16:creationId xmlns:a16="http://schemas.microsoft.com/office/drawing/2014/main" id="{27766FBD-B591-A037-FCEC-DAE1E68C397F}"/>
               </a:ext>
             </a:extLst>
@@ -4689,7 +4917,7 @@
           <a:p>
             <a:fld id="{2A226FEB-661D-4181-84CB-C53DCFE1931A}" type="slidenum">
               <a:rPr lang="ko-KR" altLang="en-US" smtClean="0"/>
-              <a:t>2</a:t>
+              <a:t>3</a:t>
             </a:fld>
             <a:endParaRPr lang="ko-KR" altLang="en-US"/>
           </a:p>
@@ -4708,7 +4936,7 @@
 </p:sld>
 </file>
 
-<file path=ppt/slides/slide3.xml><?xml version="1.0" encoding="utf-8"?>
+<file path=ppt/slides/slide4.xml><?xml version="1.0" encoding="utf-8"?>
 <p:sld xmlns:a="http://schemas.openxmlformats.org/drawingml/2006/main" xmlns:r="http://schemas.openxmlformats.org/officeDocument/2006/relationships" xmlns:p="http://schemas.openxmlformats.org/presentationml/2006/main">
   <p:cSld>
     <p:spTree>
@@ -4837,7 +5065,7 @@
           <a:p>
             <a:fld id="{2A226FEB-661D-4181-84CB-C53DCFE1931A}" type="slidenum">
               <a:rPr lang="ko-KR" altLang="en-US" smtClean="0"/>
-              <a:t>3</a:t>
+              <a:t>4</a:t>
             </a:fld>
             <a:endParaRPr lang="ko-KR" altLang="en-US"/>
           </a:p>
@@ -8715,7 +8943,7 @@
 </p:sld>
 </file>
 
-<file path=ppt/slides/slide4.xml><?xml version="1.0" encoding="utf-8"?>
+<file path=ppt/slides/slide5.xml><?xml version="1.0" encoding="utf-8"?>
 <p:sld xmlns:a="http://schemas.openxmlformats.org/drawingml/2006/main" xmlns:r="http://schemas.openxmlformats.org/officeDocument/2006/relationships" xmlns:p="http://schemas.openxmlformats.org/presentationml/2006/main">
   <p:cSld>
     <p:spTree>
@@ -8833,7 +9061,7 @@
           <a:p>
             <a:fld id="{2A226FEB-661D-4181-84CB-C53DCFE1931A}" type="slidenum">
               <a:rPr lang="ko-KR" altLang="en-US" smtClean="0"/>
-              <a:t>4</a:t>
+              <a:t>5</a:t>
             </a:fld>
             <a:endParaRPr lang="ko-KR" altLang="en-US"/>
           </a:p>
@@ -8888,7 +9116,7 @@
 </p:sld>
 </file>
 
-<file path=ppt/slides/slide5.xml><?xml version="1.0" encoding="utf-8"?>
+<file path=ppt/slides/slide6.xml><?xml version="1.0" encoding="utf-8"?>
 <p:sld xmlns:a="http://schemas.openxmlformats.org/drawingml/2006/main" xmlns:r="http://schemas.openxmlformats.org/officeDocument/2006/relationships" xmlns:p="http://schemas.openxmlformats.org/presentationml/2006/main">
   <p:cSld>
     <p:spTree>
@@ -9323,7 +9551,7 @@
           <a:p>
             <a:fld id="{2A226FEB-661D-4181-84CB-C53DCFE1931A}" type="slidenum">
               <a:rPr lang="ko-KR" altLang="en-US" smtClean="0"/>
-              <a:t>5</a:t>
+              <a:t>6</a:t>
             </a:fld>
             <a:endParaRPr lang="ko-KR" altLang="en-US"/>
           </a:p>
